--- a/assets/pptx/catalog-190.pptx
+++ b/assets/pptx/catalog-190.pptx
@@ -3299,7 +3299,7 @@
                 <a:ea typeface="Ebrima"/>
                 <a:cs typeface="Ebrima"/>
               </a:rPr>
-              <a:t>አጥናለሁ ሁልጊዜ የመረጥከኝም አንተው ነህ ለዚህ ስራ (2x)</a:t>
+              <a:t>አጥናለሁ ሁልጊዜ የመረጥከኝም አንተው ነህ ለዚህ ስራ 2x</a:t>
             </a:r>
           </a:p>
         </p:txBody>
@@ -3384,7 +3384,7 @@
                 <a:ea typeface="Ebrima"/>
                 <a:cs typeface="Ebrima"/>
               </a:rPr>
-              <a:t>አቀርብልሃለሁ የነፍሴን ውዳሴ የነፍሴን ውዳሴ (2x)</a:t>
+              <a:t>አቀርብልሃለሁ የነፍሴን ውዳሴ የነፍሴን ውዳሴ 2x</a:t>
             </a:r>
           </a:p>
         </p:txBody>
@@ -3469,7 +3469,7 @@
                 <a:ea typeface="Ebrima"/>
                 <a:cs typeface="Ebrima"/>
               </a:rPr>
-              <a:t>ንገሥብኝ ንገሥብኝ (2x)</a:t>
+              <a:t>ንገሥብኝ ንገሥብኝ 2x</a:t>
             </a:r>
           </a:p>
         </p:txBody>
@@ -3536,7 +3536,7 @@
                 <a:ea typeface="Ebrima"/>
                 <a:cs typeface="Ebrima"/>
               </a:rPr>
-              <a:t>ዓመታቶችህ አያልቁምና (ዘለዓለማዊ ዘለዓለማዊ)</a:t>
+              <a:t>ዓመታቶችህ አያልቁምና ዘለዓለማዊ ዘለዓለማዊ</a:t>
             </a:r>
           </a:p>
           <a:p>
@@ -3554,7 +3554,7 @@
                 <a:ea typeface="Ebrima"/>
                 <a:cs typeface="Ebrima"/>
               </a:rPr>
-              <a:t>የዕድሜ መነሻ መጨረሻ (ዘለዓለማዊ ዘለዓለማዊ)</a:t>
+              <a:t>የዕድሜ መነሻ መጨረሻ ዘለዓለማዊ ዘለዓለማዊ</a:t>
             </a:r>
           </a:p>
           <a:p>
@@ -3572,7 +3572,7 @@
                 <a:ea typeface="Ebrima"/>
                 <a:cs typeface="Ebrima"/>
               </a:rPr>
-              <a:t>የፍጥረት ንጉሥ የፍጥረት ጌታ (ዘለዓለማዊ ዘለዓለማዊ)</a:t>
+              <a:t>የፍጥረት ንጉሥ የፍጥረት ጌታ ዘለዓለማዊ ዘለዓለማዊ</a:t>
             </a:r>
           </a:p>
           <a:p>
@@ -3590,7 +3590,7 @@
                 <a:ea typeface="Ebrima"/>
                 <a:cs typeface="Ebrima"/>
               </a:rPr>
-              <a:t>ይሰማ ለአንተ በኩር ምሥጋና (ዘለዓለማዊ ዘለዓለማዊ) (2x)</a:t>
+              <a:t>ይሰማ ለአንተ በኩር ምሥጋና ዘለዓለማዊ ዘለዓለማዊ 2x</a:t>
             </a:r>
           </a:p>
         </p:txBody>
@@ -3675,7 +3675,7 @@
                 <a:ea typeface="Ebrima"/>
                 <a:cs typeface="Ebrima"/>
               </a:rPr>
-              <a:t>ለዘላለም ትኖራለህ ተከብረህ/ነግሰህ (4x)</a:t>
+              <a:t>ለዘላለም ትኖራለህ ተከብረህ/ነግሰህ 4x</a:t>
             </a:r>
           </a:p>
         </p:txBody>
